--- a/content/2026-2/cea055-estatistica-probabilidade/02-estatistica-descritiva-ii/Aula_02_Estatistica_Descritiva_II.pptx
+++ b/content/2026-2/cea055-estatistica-probabilidade/02-estatistica-descritiva-ii/Aula_02_Estatistica_Descritiva_II.pptx
@@ -5,7 +5,7 @@
     <p:sldMasterId id="2147483648" r:id="rId1"/>
   </p:sldMasterIdLst>
   <p:notesMasterIdLst>
-    <p:notesMasterId r:id="rId18"/>
+    <p:notesMasterId r:id="rId19"/>
   </p:notesMasterIdLst>
   <p:sldIdLst>
     <p:sldId id="292" r:id="rId2"/>
@@ -24,6 +24,7 @@
     <p:sldId id="319" r:id="rId15"/>
     <p:sldId id="320" r:id="rId16"/>
     <p:sldId id="311" r:id="rId17"/>
+    <p:sldId id="321" r:id="rId18"/>
   </p:sldIdLst>
   <p:sldSz cx="12192000" cy="6858000"/>
   <p:notesSz cx="6858000" cy="9144000"/>
@@ -1160,7 +1161,7 @@
           <a:p>
             <a:fld id="{44623A65-BD25-40B6-8815-498297225DF7}" type="datetimeFigureOut">
               <a:rPr lang="pt-BR" smtClean="0"/>
-              <a:t>26/08/2026</a:t>
+              <a:t>22/10/2026</a:t>
             </a:fld>
             <a:endParaRPr lang="pt-BR" dirty="0"/>
           </a:p>
@@ -1516,6 +1517,95 @@
 </p:notes>
 </file>
 
+<file path=ppt/notesSlides/notesSlide2.xml><?xml version="1.0" encoding="utf-8"?>
+<p:notes xmlns:a="http://schemas.openxmlformats.org/drawingml/2006/main" xmlns:r="http://schemas.openxmlformats.org/officeDocument/2006/relationships" xmlns:p="http://schemas.openxmlformats.org/presentationml/2006/main">
+  <p:cSld>
+    <p:spTree>
+      <p:nvGrpSpPr>
+        <p:cNvPr id="1" name=""/>
+        <p:cNvGrpSpPr/>
+        <p:nvPr/>
+      </p:nvGrpSpPr>
+      <p:grpSpPr>
+        <a:xfrm>
+          <a:off x="0" y="0"/>
+          <a:ext cx="0" cy="0"/>
+          <a:chOff x="0" y="0"/>
+          <a:chExt cx="0" cy="0"/>
+        </a:xfrm>
+      </p:grpSpPr>
+      <p:sp>
+        <p:nvSpPr>
+          <p:cNvPr id="2" name="Espaço Reservado para Imagem de Slide 1"/>
+          <p:cNvSpPr>
+            <a:spLocks noGrp="1" noRot="1" noChangeAspect="1"/>
+          </p:cNvSpPr>
+          <p:nvPr>
+            <p:ph type="sldImg"/>
+          </p:nvPr>
+        </p:nvSpPr>
+        <p:spPr>
+          <a:xfrm>
+            <a:off x="685800" y="1143000"/>
+            <a:ext cx="5486400" cy="3086100"/>
+          </a:xfrm>
+        </p:spPr>
+      </p:sp>
+      <p:sp>
+        <p:nvSpPr>
+          <p:cNvPr id="3" name="Espaço Reservado para Anotações 2"/>
+          <p:cNvSpPr>
+            <a:spLocks noGrp="1"/>
+          </p:cNvSpPr>
+          <p:nvPr>
+            <p:ph type="body" idx="1"/>
+          </p:nvPr>
+        </p:nvSpPr>
+        <p:spPr/>
+        <p:txBody>
+          <a:bodyPr/>
+          <a:lstStyle/>
+          <a:p>
+            <a:endParaRPr lang="pt-BR" dirty="0"/>
+          </a:p>
+        </p:txBody>
+      </p:sp>
+      <p:sp>
+        <p:nvSpPr>
+          <p:cNvPr id="4" name="Espaço Reservado para Número de Slide 3"/>
+          <p:cNvSpPr>
+            <a:spLocks noGrp="1"/>
+          </p:cNvSpPr>
+          <p:nvPr>
+            <p:ph type="sldNum" sz="quarter" idx="5"/>
+          </p:nvPr>
+        </p:nvSpPr>
+        <p:spPr/>
+        <p:txBody>
+          <a:bodyPr/>
+          <a:lstStyle/>
+          <a:p>
+            <a:fld id="{7D7F89C7-0D7F-4B10-AF98-1416A21C67FE}" type="slidenum">
+              <a:rPr lang="pt-BR" smtClean="0"/>
+              <a:t>17</a:t>
+            </a:fld>
+            <a:endParaRPr lang="pt-BR" dirty="0"/>
+          </a:p>
+        </p:txBody>
+      </p:sp>
+    </p:spTree>
+    <p:extLst>
+      <p:ext uri="{BB962C8B-B14F-4D97-AF65-F5344CB8AC3E}">
+        <p14:creationId xmlns:p14="http://schemas.microsoft.com/office/powerpoint/2010/main" val="3466203219"/>
+      </p:ext>
+    </p:extLst>
+  </p:cSld>
+  <p:clrMapOvr>
+    <a:masterClrMapping/>
+  </p:clrMapOvr>
+</p:notes>
+</file>
+
 <file path=ppt/slideLayouts/slideLayout1.xml><?xml version="1.0" encoding="utf-8"?>
 <p:sldLayout xmlns:a="http://schemas.openxmlformats.org/drawingml/2006/main" xmlns:r="http://schemas.openxmlformats.org/officeDocument/2006/relationships" xmlns:p="http://schemas.openxmlformats.org/presentationml/2006/main" type="title" preserve="1">
   <p:cSld name="Slide de Título">
@@ -1663,7 +1753,7 @@
           <a:p>
             <a:fld id="{5B45E566-B383-4B2D-B951-1136FD38326E}" type="datetimeFigureOut">
               <a:rPr lang="pt-BR" smtClean="0"/>
-              <a:t>26/08/2026</a:t>
+              <a:t>22/10/2026</a:t>
             </a:fld>
             <a:endParaRPr lang="pt-BR" dirty="0"/>
           </a:p>
@@ -1861,7 +1951,7 @@
           <a:p>
             <a:fld id="{5B45E566-B383-4B2D-B951-1136FD38326E}" type="datetimeFigureOut">
               <a:rPr lang="pt-BR" smtClean="0"/>
-              <a:t>26/08/2026</a:t>
+              <a:t>22/10/2026</a:t>
             </a:fld>
             <a:endParaRPr lang="pt-BR" dirty="0"/>
           </a:p>
@@ -2069,7 +2159,7 @@
           <a:p>
             <a:fld id="{5B45E566-B383-4B2D-B951-1136FD38326E}" type="datetimeFigureOut">
               <a:rPr lang="pt-BR" smtClean="0"/>
-              <a:t>26/08/2026</a:t>
+              <a:t>22/10/2026</a:t>
             </a:fld>
             <a:endParaRPr lang="pt-BR" dirty="0"/>
           </a:p>
@@ -2267,7 +2357,7 @@
           <a:p>
             <a:fld id="{5B45E566-B383-4B2D-B951-1136FD38326E}" type="datetimeFigureOut">
               <a:rPr lang="pt-BR" smtClean="0"/>
-              <a:t>26/08/2026</a:t>
+              <a:t>22/10/2026</a:t>
             </a:fld>
             <a:endParaRPr lang="pt-BR" dirty="0"/>
           </a:p>
@@ -2542,7 +2632,7 @@
           <a:p>
             <a:fld id="{5B45E566-B383-4B2D-B951-1136FD38326E}" type="datetimeFigureOut">
               <a:rPr lang="pt-BR" smtClean="0"/>
-              <a:t>26/08/2026</a:t>
+              <a:t>22/10/2026</a:t>
             </a:fld>
             <a:endParaRPr lang="pt-BR" dirty="0"/>
           </a:p>
@@ -2807,7 +2897,7 @@
           <a:p>
             <a:fld id="{5B45E566-B383-4B2D-B951-1136FD38326E}" type="datetimeFigureOut">
               <a:rPr lang="pt-BR" smtClean="0"/>
-              <a:t>26/08/2026</a:t>
+              <a:t>22/10/2026</a:t>
             </a:fld>
             <a:endParaRPr lang="pt-BR" dirty="0"/>
           </a:p>
@@ -3219,7 +3309,7 @@
           <a:p>
             <a:fld id="{5B45E566-B383-4B2D-B951-1136FD38326E}" type="datetimeFigureOut">
               <a:rPr lang="pt-BR" smtClean="0"/>
-              <a:t>26/08/2026</a:t>
+              <a:t>22/10/2026</a:t>
             </a:fld>
             <a:endParaRPr lang="pt-BR" dirty="0"/>
           </a:p>
@@ -3360,7 +3450,7 @@
           <a:p>
             <a:fld id="{5B45E566-B383-4B2D-B951-1136FD38326E}" type="datetimeFigureOut">
               <a:rPr lang="pt-BR" smtClean="0"/>
-              <a:t>26/08/2026</a:t>
+              <a:t>22/10/2026</a:t>
             </a:fld>
             <a:endParaRPr lang="pt-BR" dirty="0"/>
           </a:p>
@@ -3473,7 +3563,7 @@
           <a:p>
             <a:fld id="{5B45E566-B383-4B2D-B951-1136FD38326E}" type="datetimeFigureOut">
               <a:rPr lang="pt-BR" smtClean="0"/>
-              <a:t>26/08/2026</a:t>
+              <a:t>22/10/2026</a:t>
             </a:fld>
             <a:endParaRPr lang="pt-BR" dirty="0"/>
           </a:p>
@@ -3784,7 +3874,7 @@
           <a:p>
             <a:fld id="{5B45E566-B383-4B2D-B951-1136FD38326E}" type="datetimeFigureOut">
               <a:rPr lang="pt-BR" smtClean="0"/>
-              <a:t>26/08/2026</a:t>
+              <a:t>22/10/2026</a:t>
             </a:fld>
             <a:endParaRPr lang="pt-BR" dirty="0"/>
           </a:p>
@@ -4072,7 +4162,7 @@
           <a:p>
             <a:fld id="{5B45E566-B383-4B2D-B951-1136FD38326E}" type="datetimeFigureOut">
               <a:rPr lang="pt-BR" smtClean="0"/>
-              <a:t>26/08/2026</a:t>
+              <a:t>22/10/2026</a:t>
             </a:fld>
             <a:endParaRPr lang="pt-BR" dirty="0"/>
           </a:p>
@@ -4337,7 +4427,7 @@
           <a:p>
             <a:fld id="{5B45E566-B383-4B2D-B951-1136FD38326E}" type="datetimeFigureOut">
               <a:rPr lang="pt-BR" smtClean="0"/>
-              <a:t>26/08/2026</a:t>
+              <a:t>22/10/2026</a:t>
             </a:fld>
             <a:endParaRPr lang="pt-BR" dirty="0"/>
           </a:p>
@@ -5182,8 +5272,8 @@
           </a:prstGeom>
         </p:spPr>
       </p:pic>
-      <mc:AlternateContent xmlns:mc="http://schemas.openxmlformats.org/markup-compatibility/2006">
-        <mc:Choice xmlns:a14="http://schemas.microsoft.com/office/drawing/2010/main" Requires="a14">
+      <mc:AlternateContent xmlns:mc="http://schemas.openxmlformats.org/markup-compatibility/2006" xmlns:a14="http://schemas.microsoft.com/office/drawing/2010/main">
+        <mc:Choice Requires="a14">
           <p:sp>
             <p:nvSpPr>
               <p:cNvPr id="4" name="BoxplotExplanation">
@@ -5541,7 +5631,7 @@
             </p:txBody>
           </p:sp>
         </mc:Choice>
-        <mc:Fallback>
+        <mc:Fallback xmlns="">
           <p:sp>
             <p:nvSpPr>
               <p:cNvPr id="4" name="BoxplotExplanation">
@@ -8743,7 +8833,7 @@
         <p:spPr>
           <a:xfrm>
             <a:off x="791311" y="608369"/>
-            <a:ext cx="10827959" cy="4831579"/>
+            <a:ext cx="10827959" cy="3031086"/>
           </a:xfrm>
           <a:prstGeom prst="rect">
             <a:avLst/>
@@ -8813,45 +8903,13 @@
             </a:pPr>
             <a:r>
               <a:rPr lang="pt-BR" sz="2600" dirty="0"/>
-              <a:t>Magalhães &amp; Lima — Cap. 4: 4.2, 4.3; Cap. 1: 1.2 (box-plot)</a:t>
-            </a:r>
-          </a:p>
-          <a:p>
-            <a:pPr>
-              <a:lnSpc>
-                <a:spcPct val="150000"/>
-              </a:lnSpc>
-            </a:pPr>
-            <a:r>
-              <a:rPr lang="pt-BR" sz="2600" dirty="0"/>
-              <a:t>Exercícios recomendados:</a:t>
-            </a:r>
-          </a:p>
-          <a:p>
-            <a:pPr marL="457178" indent="-457178">
-              <a:lnSpc>
-                <a:spcPct val="150000"/>
-              </a:lnSpc>
-              <a:buFont typeface="Arial" panose="020B0604020202020204" pitchFamily="34" charset="0"/>
-              <a:buChar char="•"/>
-            </a:pPr>
-            <a:r>
-              <a:rPr lang="pt-BR" sz="2600" dirty="0"/>
-              <a:t>Bussab, Cap. 3: exercícios de 1 ao 13</a:t>
-            </a:r>
-          </a:p>
-          <a:p>
-            <a:pPr marL="457178" indent="-457178">
-              <a:lnSpc>
-                <a:spcPct val="150000"/>
-              </a:lnSpc>
-              <a:buFont typeface="Arial" panose="020B0604020202020204" pitchFamily="34" charset="0"/>
-              <a:buChar char="•"/>
-            </a:pPr>
-            <a:r>
-              <a:rPr lang="pt-BR" sz="2600" dirty="0"/>
-              <a:t>Bussab, exercícios 3.8: 14, 15, 16, 19, 20, 22, 25, 26, 28, 29 e 30</a:t>
-            </a:r>
+              <a:t>Magalhães &amp; Lima — Cap. 4: 4.2, 4.3; Cap. 1: 1.2 (</a:t>
+            </a:r>
+            <a:r>
+              <a:rPr lang="pt-BR" sz="2600"/>
+              <a:t>box-plot)</a:t>
+            </a:r>
+            <a:endParaRPr lang="pt-BR" sz="2600" dirty="0"/>
           </a:p>
         </p:txBody>
       </p:sp>
@@ -8894,6 +8952,169 @@
     <p:extLst>
       <p:ext uri="{BB962C8B-B14F-4D97-AF65-F5344CB8AC3E}">
         <p14:creationId xmlns:p14="http://schemas.microsoft.com/office/powerpoint/2010/main" val="2449392753"/>
+      </p:ext>
+    </p:extLst>
+  </p:cSld>
+  <p:clrMapOvr>
+    <a:masterClrMapping/>
+  </p:clrMapOvr>
+</p:sld>
+</file>
+
+<file path=ppt/slides/slide17.xml><?xml version="1.0" encoding="utf-8"?>
+<p:sld xmlns:a="http://schemas.openxmlformats.org/drawingml/2006/main" xmlns:r="http://schemas.openxmlformats.org/officeDocument/2006/relationships" xmlns:p="http://schemas.openxmlformats.org/presentationml/2006/main">
+  <p:cSld>
+    <p:spTree>
+      <p:nvGrpSpPr>
+        <p:cNvPr id="1" name=""/>
+        <p:cNvGrpSpPr/>
+        <p:nvPr/>
+      </p:nvGrpSpPr>
+      <p:grpSpPr>
+        <a:xfrm>
+          <a:off x="0" y="0"/>
+          <a:ext cx="0" cy="0"/>
+          <a:chOff x="0" y="0"/>
+          <a:chExt cx="0" cy="0"/>
+        </a:xfrm>
+      </p:grpSpPr>
+      <p:sp>
+        <p:nvSpPr>
+          <p:cNvPr id="6" name="CaixaDeTexto 5">
+            <a:extLst>
+              <a:ext uri="{FF2B5EF4-FFF2-40B4-BE49-F238E27FC236}">
+                <a16:creationId xmlns:a16="http://schemas.microsoft.com/office/drawing/2014/main" id="{720B10DA-C761-4DEE-8D86-E170E1C2E981}"/>
+              </a:ext>
+            </a:extLst>
+          </p:cNvPr>
+          <p:cNvSpPr txBox="1"/>
+          <p:nvPr/>
+        </p:nvSpPr>
+        <p:spPr>
+          <a:xfrm>
+            <a:off x="791311" y="608369"/>
+            <a:ext cx="10827959" cy="4231415"/>
+          </a:xfrm>
+          <a:prstGeom prst="rect">
+            <a:avLst/>
+          </a:prstGeom>
+          <a:noFill/>
+        </p:spPr>
+        <p:txBody>
+          <a:bodyPr wrap="square" rtlCol="0">
+            <a:spAutoFit/>
+          </a:bodyPr>
+          <a:lstStyle/>
+          <a:p>
+            <a:pPr>
+              <a:lnSpc>
+                <a:spcPct val="150000"/>
+              </a:lnSpc>
+            </a:pPr>
+            <a:r>
+              <a:rPr lang="pt-BR" sz="2600" b="1" dirty="0"/>
+              <a:t>Atividades referentes </a:t>
+            </a:r>
+            <a:r>
+              <a:rPr lang="pt-BR" sz="2600" b="1"/>
+              <a:t>à aula (continuação)</a:t>
+            </a:r>
+            <a:endParaRPr lang="pt-BR" sz="2600" b="1" dirty="0"/>
+          </a:p>
+          <a:p>
+            <a:pPr>
+              <a:lnSpc>
+                <a:spcPct val="150000"/>
+              </a:lnSpc>
+            </a:pPr>
+            <a:r>
+              <a:rPr lang="pt-BR" sz="2600"/>
+              <a:t>Exercícios recomendados:</a:t>
+            </a:r>
+            <a:endParaRPr lang="it-IT" sz="2600"/>
+          </a:p>
+          <a:p>
+            <a:pPr marL="457178" indent="-457178">
+              <a:lnSpc>
+                <a:spcPct val="150000"/>
+              </a:lnSpc>
+              <a:buFont typeface="Arial" panose="020B0604020202020204" pitchFamily="34" charset="0"/>
+              <a:buChar char="•"/>
+            </a:pPr>
+            <a:r>
+              <a:rPr lang="it-IT" sz="2600"/>
+              <a:t>Bussab &amp; Morettin — Cap. 3: Problemas 1, 2, 3, 7, 9, 10, 11, 12 e 13</a:t>
+            </a:r>
+            <a:endParaRPr lang="pt-BR" sz="2600"/>
+          </a:p>
+          <a:p>
+            <a:pPr marL="457178" indent="-457178">
+              <a:lnSpc>
+                <a:spcPct val="150000"/>
+              </a:lnSpc>
+              <a:buFont typeface="Arial" panose="020B0604020202020204" pitchFamily="34" charset="0"/>
+              <a:buChar char="•"/>
+            </a:pPr>
+            <a:r>
+              <a:rPr lang="pt-BR" sz="2600"/>
+              <a:t>Magalhães &amp; Lima — Cap. 1: Exercícios 9, 15 e 16; Cap. 4: Exercícios 1, 2, 6, 8, 9, 10 e 12</a:t>
+            </a:r>
+          </a:p>
+          <a:p>
+            <a:pPr marL="457178" indent="-457178">
+              <a:lnSpc>
+                <a:spcPct val="150000"/>
+              </a:lnSpc>
+              <a:buFont typeface="Arial" panose="020B0604020202020204" pitchFamily="34" charset="0"/>
+              <a:buChar char="•"/>
+            </a:pPr>
+            <a:r>
+              <a:rPr lang="pt-BR" sz="2600"/>
+              <a:t>Montgomery &amp; Runger — Cap. 6: Exercícios 6.1.4, 6.1.5, 6.1.6, 6.1.7, 6.1.8, 6.1.9, 6.1.11, 6.4.3, 6.4.4 e 6.4.5</a:t>
+            </a:r>
+            <a:endParaRPr lang="pt-BR" sz="2600" dirty="0"/>
+          </a:p>
+        </p:txBody>
+      </p:sp>
+      <p:sp>
+        <p:nvSpPr>
+          <p:cNvPr id="7" name="CaixaDeTexto 6">
+            <a:extLst>
+              <a:ext uri="{FF2B5EF4-FFF2-40B4-BE49-F238E27FC236}">
+                <a16:creationId xmlns:a16="http://schemas.microsoft.com/office/drawing/2014/main" id="{A49F6C3D-C6CD-46EB-B00C-3C31995D5B04}"/>
+              </a:ext>
+            </a:extLst>
+          </p:cNvPr>
+          <p:cNvSpPr txBox="1"/>
+          <p:nvPr/>
+        </p:nvSpPr>
+        <p:spPr>
+          <a:xfrm>
+            <a:off x="361395" y="6488668"/>
+            <a:ext cx="4658776" cy="300210"/>
+          </a:xfrm>
+          <a:prstGeom prst="rect">
+            <a:avLst/>
+          </a:prstGeom>
+          <a:noFill/>
+        </p:spPr>
+        <p:txBody>
+          <a:bodyPr wrap="none" rtlCol="0">
+            <a:spAutoFit/>
+          </a:bodyPr>
+          <a:lstStyle/>
+          <a:p>
+            <a:r>
+              <a:rPr lang="pt-BR" sz="1351" dirty="0"/>
+              <a:t>CEA055 - Estatística e Probabilidade - Prof. Marcos Goulart Lima</a:t>
+            </a:r>
+          </a:p>
+        </p:txBody>
+      </p:sp>
+    </p:spTree>
+    <p:extLst>
+      <p:ext uri="{BB962C8B-B14F-4D97-AF65-F5344CB8AC3E}">
+        <p14:creationId xmlns:p14="http://schemas.microsoft.com/office/powerpoint/2010/main" val="2500739405"/>
       </p:ext>
     </p:extLst>
   </p:cSld>
@@ -10449,8 +10670,8 @@
           <a:chExt cx="0" cy="0"/>
         </a:xfrm>
       </p:grpSpPr>
-      <mc:AlternateContent xmlns:mc="http://schemas.openxmlformats.org/markup-compatibility/2006">
-        <mc:Choice xmlns:a14="http://schemas.microsoft.com/office/drawing/2010/main" Requires="a14">
+      <mc:AlternateContent xmlns:mc="http://schemas.openxmlformats.org/markup-compatibility/2006" xmlns:a14="http://schemas.microsoft.com/office/drawing/2010/main">
+        <mc:Choice Requires="a14">
           <p:sp>
             <p:nvSpPr>
               <p:cNvPr id="6" name="CaixaDeTexto 5">
@@ -10729,7 +10950,7 @@
             </p:txBody>
           </p:sp>
         </mc:Choice>
-        <mc:Fallback>
+        <mc:Fallback xmlns="">
           <p:sp>
             <p:nvSpPr>
               <p:cNvPr id="6" name="CaixaDeTexto 5">
@@ -11153,8 +11374,8 @@
           <a:chExt cx="0" cy="0"/>
         </a:xfrm>
       </p:grpSpPr>
-      <mc:AlternateContent xmlns:mc="http://schemas.openxmlformats.org/markup-compatibility/2006">
-        <mc:Choice xmlns:a14="http://schemas.microsoft.com/office/drawing/2010/main" Requires="a14">
+      <mc:AlternateContent xmlns:mc="http://schemas.openxmlformats.org/markup-compatibility/2006" xmlns:a14="http://schemas.microsoft.com/office/drawing/2010/main">
+        <mc:Choice Requires="a14">
           <p:sp>
             <p:nvSpPr>
               <p:cNvPr id="6" name="CaixaDeTexto 5">
@@ -11539,7 +11760,7 @@
             </p:txBody>
           </p:sp>
         </mc:Choice>
-        <mc:Fallback>
+        <mc:Fallback xmlns="">
           <p:sp>
             <p:nvSpPr>
               <p:cNvPr id="6" name="CaixaDeTexto 5">

--- a/content/2026-2/cea055-estatistica-probabilidade/02-estatistica-descritiva-ii/Aula_02_Estatistica_Descritiva_II.pptx
+++ b/content/2026-2/cea055-estatistica-probabilidade/02-estatistica-descritiva-ii/Aula_02_Estatistica_Descritiva_II.pptx
@@ -4928,9 +4928,10 @@
               </a:lnSpc>
             </a:pPr>
             <a:r>
-              <a:rPr lang="pt-BR" sz="2200" b="1" dirty="0"/>
-              <a:t>Objetivos do aula:</a:t>
-            </a:r>
+              <a:rPr lang="pt-BR" sz="2200" b="1"/>
+              <a:t>Objetivos da aula:</a:t>
+            </a:r>
+            <a:endParaRPr lang="pt-BR" sz="2200" b="1" dirty="0"/>
           </a:p>
           <a:p>
             <a:pPr marL="285737" indent="-285737">
@@ -5029,15 +5030,23 @@
             </a:pPr>
             <a:r>
               <a:rPr lang="pt-BR" sz="2200" dirty="0"/>
-              <a:t>Montgomery, Runger. </a:t>
-            </a:r>
-            <a:r>
-              <a:rPr lang="pt-BR" sz="2200" b="1" dirty="0"/>
-              <a:t>Applied Statistics and Probability for Engineers</a:t>
+              <a:t>Montgomery, Runger</a:t>
+            </a:r>
+            <a:r>
+              <a:rPr lang="pt-BR" sz="2200"/>
+              <a:t>. </a:t>
+            </a:r>
+            <a:r>
+              <a:rPr lang="pt-BR" sz="2200" b="1"/>
+              <a:t>Estatística Aplicada e Probabilidade para Engenheiros</a:t>
+            </a:r>
+            <a:r>
+              <a:rPr lang="pt-BR" sz="2200"/>
+              <a:t>, 7ª ed. — </a:t>
             </a:r>
             <a:r>
               <a:rPr lang="pt-BR" sz="2200" dirty="0"/>
-              <a:t>, 7th ed — Cap. 6 (6.4)</a:t>
+              <a:t>Cap. 6 (6.4)</a:t>
             </a:r>
           </a:p>
           <a:p>
@@ -5772,7 +5781,127 @@
                       <a:rPr lang="pt-BR" sz="2800" b="0" i="1" smtClean="0">
                         <a:latin typeface="Cambria Math" panose="02040503050406030204" pitchFamily="18" charset="0"/>
                       </a:rPr>
-                      <m:t>{1,2,3,4,5,6,7,8,9,10}</m:t>
+                      <m:t>{</m:t>
+                    </m:r>
+                    <m:r>
+                      <a:rPr lang="pt-BR" sz="2800" b="0" i="1" smtClean="0">
+                        <a:latin typeface="Cambria Math" panose="02040503050406030204" pitchFamily="18" charset="0"/>
+                      </a:rPr>
+                      <m:t>1</m:t>
+                    </m:r>
+                    <m:r>
+                      <a:rPr lang="pt-BR" sz="2800" b="0" i="1" smtClean="0">
+                        <a:latin typeface="Cambria Math" panose="02040503050406030204" pitchFamily="18" charset="0"/>
+                      </a:rPr>
+                      <m:t>,</m:t>
+                    </m:r>
+                    <m:r>
+                      <a:rPr lang="pt-BR" sz="2800" b="0" i="1" smtClean="0">
+                        <a:latin typeface="Cambria Math" panose="02040503050406030204" pitchFamily="18" charset="0"/>
+                      </a:rPr>
+                      <m:t>2</m:t>
+                    </m:r>
+                    <m:r>
+                      <a:rPr lang="pt-BR" sz="2800" b="0" i="1" smtClean="0">
+                        <a:latin typeface="Cambria Math" panose="02040503050406030204" pitchFamily="18" charset="0"/>
+                      </a:rPr>
+                      <m:t>,</m:t>
+                    </m:r>
+                    <m:r>
+                      <a:rPr lang="pt-BR" sz="2800" b="0" i="1" smtClean="0">
+                        <a:latin typeface="Cambria Math" panose="02040503050406030204" pitchFamily="18" charset="0"/>
+                      </a:rPr>
+                      <m:t>3</m:t>
+                    </m:r>
+                    <m:r>
+                      <a:rPr lang="pt-BR" sz="2800" b="0" i="1" smtClean="0">
+                        <a:latin typeface="Cambria Math" panose="02040503050406030204" pitchFamily="18" charset="0"/>
+                      </a:rPr>
+                      <m:t>,</m:t>
+                    </m:r>
+                    <m:r>
+                      <a:rPr lang="pt-BR" sz="2800" b="0" i="1" smtClean="0">
+                        <a:latin typeface="Cambria Math" panose="02040503050406030204" pitchFamily="18" charset="0"/>
+                      </a:rPr>
+                      <m:t>4</m:t>
+                    </m:r>
+                    <m:r>
+                      <a:rPr lang="pt-BR" sz="2800" b="0" i="1" smtClean="0">
+                        <a:latin typeface="Cambria Math" panose="02040503050406030204" pitchFamily="18" charset="0"/>
+                      </a:rPr>
+                      <m:t>,</m:t>
+                    </m:r>
+                    <m:r>
+                      <a:rPr lang="pt-BR" sz="2800" b="0" i="1" smtClean="0">
+                        <a:latin typeface="Cambria Math" panose="02040503050406030204" pitchFamily="18" charset="0"/>
+                      </a:rPr>
+                      <m:t>5</m:t>
+                    </m:r>
+                    <m:r>
+                      <a:rPr lang="pt-BR" sz="2800" b="0" i="1" smtClean="0">
+                        <a:latin typeface="Cambria Math" panose="02040503050406030204" pitchFamily="18" charset="0"/>
+                      </a:rPr>
+                      <m:t>,</m:t>
+                    </m:r>
+                    <m:r>
+                      <a:rPr lang="pt-BR" sz="2800" b="0" i="1" smtClean="0">
+                        <a:latin typeface="Cambria Math" panose="02040503050406030204" pitchFamily="18" charset="0"/>
+                      </a:rPr>
+                      <m:t>6</m:t>
+                    </m:r>
+                    <m:r>
+                      <a:rPr lang="pt-BR" sz="2800" b="0" i="1" smtClean="0">
+                        <a:latin typeface="Cambria Math" panose="02040503050406030204" pitchFamily="18" charset="0"/>
+                      </a:rPr>
+                      <m:t>,</m:t>
+                    </m:r>
+                    <m:r>
+                      <a:rPr lang="pt-BR" sz="2800" b="0" i="1" smtClean="0">
+                        <a:latin typeface="Cambria Math" panose="02040503050406030204" pitchFamily="18" charset="0"/>
+                      </a:rPr>
+                      <m:t>7</m:t>
+                    </m:r>
+                    <m:r>
+                      <a:rPr lang="pt-BR" sz="2800" b="0" i="1" smtClean="0">
+                        <a:latin typeface="Cambria Math" panose="02040503050406030204" pitchFamily="18" charset="0"/>
+                      </a:rPr>
+                      <m:t>,</m:t>
+                    </m:r>
+                    <m:r>
+                      <a:rPr lang="pt-BR" sz="2800" b="0" i="1" smtClean="0">
+                        <a:latin typeface="Cambria Math" panose="02040503050406030204" pitchFamily="18" charset="0"/>
+                      </a:rPr>
+                      <m:t>8</m:t>
+                    </m:r>
+                    <m:r>
+                      <a:rPr lang="pt-BR" sz="2800" b="0" i="1" smtClean="0">
+                        <a:latin typeface="Cambria Math" panose="02040503050406030204" pitchFamily="18" charset="0"/>
+                      </a:rPr>
+                      <m:t>,</m:t>
+                    </m:r>
+                    <m:r>
+                      <a:rPr lang="pt-BR" sz="2800" b="0" i="1" smtClean="0">
+                        <a:latin typeface="Cambria Math" panose="02040503050406030204" pitchFamily="18" charset="0"/>
+                      </a:rPr>
+                      <m:t>9</m:t>
+                    </m:r>
+                    <m:r>
+                      <a:rPr lang="pt-BR" sz="2800" b="0" i="1" smtClean="0">
+                        <a:latin typeface="Cambria Math" panose="02040503050406030204" pitchFamily="18" charset="0"/>
+                      </a:rPr>
+                      <m:t>,</m:t>
+                    </m:r>
+                    <m:r>
+                      <a:rPr lang="pt-BR" sz="2800" b="0" i="1" smtClean="0">
+                        <a:latin typeface="Cambria Math" panose="02040503050406030204" pitchFamily="18" charset="0"/>
+                      </a:rPr>
+                      <m:t>10</m:t>
+                    </m:r>
+                    <m:r>
+                      <a:rPr lang="pt-BR" sz="2800" b="0" i="1" smtClean="0">
+                        <a:latin typeface="Cambria Math" panose="02040503050406030204" pitchFamily="18" charset="0"/>
+                      </a:rPr>
+                      <m:t>}</m:t>
                     </m:r>
                   </m:oMath>
                 </a14:m>
@@ -5792,13 +5921,127 @@
                       <a:rPr lang="pt-BR" sz="2800" b="0" i="0" smtClean="0">
                         <a:latin typeface="Cambria Math" panose="02040503050406030204" pitchFamily="18" charset="0"/>
                       </a:rPr>
-                      <m:t>{1,2,3,</m:t>
+                      <m:t>{</m:t>
+                    </m:r>
+                    <m:r>
+                      <a:rPr lang="pt-BR" sz="2800" b="0" i="0" smtClean="0">
+                        <a:latin typeface="Cambria Math" panose="02040503050406030204" pitchFamily="18" charset="0"/>
+                      </a:rPr>
+                      <m:t>1</m:t>
+                    </m:r>
+                    <m:r>
+                      <a:rPr lang="pt-BR" sz="2800" b="0" i="0" smtClean="0">
+                        <a:latin typeface="Cambria Math" panose="02040503050406030204" pitchFamily="18" charset="0"/>
+                      </a:rPr>
+                      <m:t>,</m:t>
+                    </m:r>
+                    <m:r>
+                      <a:rPr lang="pt-BR" sz="2800" b="0" i="0" smtClean="0">
+                        <a:latin typeface="Cambria Math" panose="02040503050406030204" pitchFamily="18" charset="0"/>
+                      </a:rPr>
+                      <m:t>2</m:t>
+                    </m:r>
+                    <m:r>
+                      <a:rPr lang="pt-BR" sz="2800" b="0" i="0" smtClean="0">
+                        <a:latin typeface="Cambria Math" panose="02040503050406030204" pitchFamily="18" charset="0"/>
+                      </a:rPr>
+                      <m:t>,</m:t>
+                    </m:r>
+                    <m:r>
+                      <a:rPr lang="pt-BR" sz="2800" b="0" i="0" smtClean="0">
+                        <a:latin typeface="Cambria Math" panose="02040503050406030204" pitchFamily="18" charset="0"/>
+                      </a:rPr>
+                      <m:t>3</m:t>
+                    </m:r>
+                    <m:r>
+                      <a:rPr lang="pt-BR" sz="2800" b="0" i="0" smtClean="0">
+                        <a:latin typeface="Cambria Math" panose="02040503050406030204" pitchFamily="18" charset="0"/>
+                      </a:rPr>
+                      <m:t>,</m:t>
                     </m:r>
                     <m:r>
                       <a:rPr lang="pt-BR" sz="2800" b="0" i="1" smtClean="0">
                         <a:latin typeface="Cambria Math" panose="02040503050406030204" pitchFamily="18" charset="0"/>
                       </a:rPr>
-                      <m:t>8,8,8,9,9,9,10}</m:t>
+                      <m:t>8</m:t>
+                    </m:r>
+                    <m:r>
+                      <a:rPr lang="pt-BR" sz="2800" b="0" i="1" smtClean="0">
+                        <a:latin typeface="Cambria Math" panose="02040503050406030204" pitchFamily="18" charset="0"/>
+                      </a:rPr>
+                      <m:t>,</m:t>
+                    </m:r>
+                    <m:r>
+                      <a:rPr lang="pt-BR" sz="2800" b="0" i="1" smtClean="0">
+                        <a:latin typeface="Cambria Math" panose="02040503050406030204" pitchFamily="18" charset="0"/>
+                      </a:rPr>
+                      <m:t>8</m:t>
+                    </m:r>
+                    <m:r>
+                      <a:rPr lang="pt-BR" sz="2800" b="0" i="1" smtClean="0">
+                        <a:latin typeface="Cambria Math" panose="02040503050406030204" pitchFamily="18" charset="0"/>
+                      </a:rPr>
+                      <m:t>,</m:t>
+                    </m:r>
+                    <m:r>
+                      <a:rPr lang="pt-BR" sz="2800" b="0" i="1" smtClean="0">
+                        <a:latin typeface="Cambria Math" panose="02040503050406030204" pitchFamily="18" charset="0"/>
+                      </a:rPr>
+                      <m:t>8</m:t>
+                    </m:r>
+                    <m:r>
+                      <a:rPr lang="pt-BR" sz="2800" b="0" i="1" smtClean="0">
+                        <a:latin typeface="Cambria Math" panose="02040503050406030204" pitchFamily="18" charset="0"/>
+                      </a:rPr>
+                      <m:t>,</m:t>
+                    </m:r>
+                    <m:r>
+                      <a:rPr lang="pt-BR" sz="2800" b="0" i="1" smtClean="0">
+                        <a:latin typeface="Cambria Math" panose="02040503050406030204" pitchFamily="18" charset="0"/>
+                      </a:rPr>
+                      <m:t>9</m:t>
+                    </m:r>
+                    <m:r>
+                      <a:rPr lang="pt-BR" sz="2800" b="0" i="1" smtClean="0">
+                        <a:latin typeface="Cambria Math" panose="02040503050406030204" pitchFamily="18" charset="0"/>
+                      </a:rPr>
+                      <m:t>,</m:t>
+                    </m:r>
+                    <m:r>
+                      <a:rPr lang="pt-BR" sz="2800" b="0" i="1" smtClean="0">
+                        <a:latin typeface="Cambria Math" panose="02040503050406030204" pitchFamily="18" charset="0"/>
+                      </a:rPr>
+                      <m:t>9</m:t>
+                    </m:r>
+                    <m:r>
+                      <a:rPr lang="pt-BR" sz="2800" b="0" i="1" smtClean="0">
+                        <a:latin typeface="Cambria Math" panose="02040503050406030204" pitchFamily="18" charset="0"/>
+                      </a:rPr>
+                      <m:t>,</m:t>
+                    </m:r>
+                    <m:r>
+                      <a:rPr lang="pt-BR" sz="2800" b="0" i="1" smtClean="0">
+                        <a:latin typeface="Cambria Math" panose="02040503050406030204" pitchFamily="18" charset="0"/>
+                      </a:rPr>
+                      <m:t>9</m:t>
+                    </m:r>
+                    <m:r>
+                      <a:rPr lang="pt-BR" sz="2800" b="0" i="1" smtClean="0">
+                        <a:latin typeface="Cambria Math" panose="02040503050406030204" pitchFamily="18" charset="0"/>
+                      </a:rPr>
+                      <m:t>,</m:t>
+                    </m:r>
+                    <m:r>
+                      <a:rPr lang="pt-BR" sz="2800" b="0" i="1" smtClean="0">
+                        <a:latin typeface="Cambria Math" panose="02040503050406030204" pitchFamily="18" charset="0"/>
+                      </a:rPr>
+                      <m:t>10</m:t>
+                    </m:r>
+                    <m:r>
+                      <a:rPr lang="pt-BR" sz="2800" b="0" i="1" smtClean="0">
+                        <a:latin typeface="Cambria Math" panose="02040503050406030204" pitchFamily="18" charset="0"/>
+                      </a:rPr>
+                      <m:t>}</m:t>
                     </m:r>
                   </m:oMath>
                 </a14:m>
@@ -5993,7 +6236,19 @@
                           <a:rPr lang="pt-BR" sz="2800" b="0" i="1" smtClean="0">
                             <a:latin typeface="Cambria Math" panose="02040503050406030204" pitchFamily="18" charset="0"/>
                           </a:rPr>
-                          <m:t>0,5</m:t>
+                          <m:t>0</m:t>
+                        </m:r>
+                        <m:r>
+                          <a:rPr lang="pt-BR" sz="2800" b="0" i="1" smtClean="0">
+                            <a:latin typeface="Cambria Math" panose="02040503050406030204" pitchFamily="18" charset="0"/>
+                          </a:rPr>
+                          <m:t>,</m:t>
+                        </m:r>
+                        <m:r>
+                          <a:rPr lang="pt-BR" sz="2800" b="0" i="1" smtClean="0">
+                            <a:latin typeface="Cambria Math" panose="02040503050406030204" pitchFamily="18" charset="0"/>
+                          </a:rPr>
+                          <m:t>5</m:t>
                         </m:r>
                       </m:e>
                     </m:d>
@@ -6081,7 +6336,19 @@
                               <a:rPr lang="pt-BR" sz="2800" b="0" i="1" smtClean="0">
                                 <a:latin typeface="Cambria Math" panose="02040503050406030204" pitchFamily="18" charset="0"/>
                               </a:rPr>
-                              <m:t>+1−</m:t>
+                              <m:t>+</m:t>
+                            </m:r>
+                            <m:r>
+                              <a:rPr lang="pt-BR" sz="2800" b="0" i="1" smtClean="0">
+                                <a:latin typeface="Cambria Math" panose="02040503050406030204" pitchFamily="18" charset="0"/>
+                              </a:rPr>
+                              <m:t>1</m:t>
+                            </m:r>
+                            <m:r>
+                              <a:rPr lang="pt-BR" sz="2800" b="0" i="1" smtClean="0">
+                                <a:latin typeface="Cambria Math" panose="02040503050406030204" pitchFamily="18" charset="0"/>
+                              </a:rPr>
+                              <m:t>−</m:t>
                             </m:r>
                             <m:r>
                               <a:rPr lang="pt-BR" sz="2800" b="0" i="1" smtClean="0">
@@ -6109,7 +6376,31 @@
                       <a:rPr lang="pt-BR" sz="2800" b="0" i="1" smtClean="0">
                         <a:latin typeface="Cambria Math" panose="02040503050406030204" pitchFamily="18" charset="0"/>
                       </a:rPr>
-                      <m:t>(0,5)</m:t>
+                      <m:t>(</m:t>
+                    </m:r>
+                    <m:r>
+                      <a:rPr lang="pt-BR" sz="2800" b="0" i="1" smtClean="0">
+                        <a:latin typeface="Cambria Math" panose="02040503050406030204" pitchFamily="18" charset="0"/>
+                      </a:rPr>
+                      <m:t>0</m:t>
+                    </m:r>
+                    <m:r>
+                      <a:rPr lang="pt-BR" sz="2800" b="0" i="1" smtClean="0">
+                        <a:latin typeface="Cambria Math" panose="02040503050406030204" pitchFamily="18" charset="0"/>
+                      </a:rPr>
+                      <m:t>,</m:t>
+                    </m:r>
+                    <m:r>
+                      <a:rPr lang="pt-BR" sz="2800" b="0" i="1" smtClean="0">
+                        <a:latin typeface="Cambria Math" panose="02040503050406030204" pitchFamily="18" charset="0"/>
+                      </a:rPr>
+                      <m:t>5</m:t>
+                    </m:r>
+                    <m:r>
+                      <a:rPr lang="pt-BR" sz="2800" b="0" i="1" smtClean="0">
+                        <a:latin typeface="Cambria Math" panose="02040503050406030204" pitchFamily="18" charset="0"/>
+                      </a:rPr>
+                      <m:t>)</m:t>
                     </m:r>
                   </m:oMath>
                 </a14:m>
@@ -9553,7 +9844,13 @@
                                 <a:rPr lang="pt-BR" sz="2800" b="0" i="1" smtClean="0">
                                   <a:latin typeface="Cambria Math" panose="02040503050406030204" pitchFamily="18" charset="0"/>
                                 </a:rPr>
-                                <m:t>=1</m:t>
+                                <m:t>=</m:t>
+                              </m:r>
+                              <m:r>
+                                <a:rPr lang="pt-BR" sz="2800" b="0" i="1" smtClean="0">
+                                  <a:latin typeface="Cambria Math" panose="02040503050406030204" pitchFamily="18" charset="0"/>
+                                </a:rPr>
+                                <m:t>1</m:t>
                               </m:r>
                             </m:sub>
                             <m:sup>
@@ -9762,7 +10059,13 @@
                                 <a:rPr lang="pt-BR" sz="2800" b="0" i="1" smtClean="0">
                                   <a:latin typeface="Cambria Math" panose="02040503050406030204" pitchFamily="18" charset="0"/>
                                 </a:rPr>
-                                <m:t>=1</m:t>
+                                <m:t>=</m:t>
+                              </m:r>
+                              <m:r>
+                                <a:rPr lang="pt-BR" sz="2800" b="0" i="1" smtClean="0">
+                                  <a:latin typeface="Cambria Math" panose="02040503050406030204" pitchFamily="18" charset="0"/>
+                                </a:rPr>
+                                <m:t>1</m:t>
                               </m:r>
                             </m:sub>
                             <m:sup>
@@ -10464,7 +10767,13 @@
                       <a:rPr lang="pt-BR" sz="2800" i="1" dirty="0" smtClean="0">
                         <a:latin typeface="Cambria Math" panose="02040503050406030204" pitchFamily="18" charset="0"/>
                       </a:rPr>
-                      <m:t>0 &lt; </m:t>
+                      <m:t>0</m:t>
+                    </m:r>
+                    <m:r>
+                      <a:rPr lang="pt-BR" sz="2800" i="1" dirty="0" smtClean="0">
+                        <a:latin typeface="Cambria Math" panose="02040503050406030204" pitchFamily="18" charset="0"/>
+                      </a:rPr>
+                      <m:t> &lt; </m:t>
                     </m:r>
                     <m:r>
                       <a:rPr lang="pt-BR" sz="2800" i="1" dirty="0" smtClean="0">
@@ -10476,7 +10785,13 @@
                       <a:rPr lang="pt-BR" sz="2800" i="1" dirty="0" smtClean="0">
                         <a:latin typeface="Cambria Math" panose="02040503050406030204" pitchFamily="18" charset="0"/>
                       </a:rPr>
-                      <m:t> &lt; 1</m:t>
+                      <m:t> &lt; </m:t>
+                    </m:r>
+                    <m:r>
+                      <a:rPr lang="pt-BR" sz="2800" i="1" dirty="0" smtClean="0">
+                        <a:latin typeface="Cambria Math" panose="02040503050406030204" pitchFamily="18" charset="0"/>
+                      </a:rPr>
+                      <m:t>1</m:t>
                     </m:r>
                   </m:oMath>
                 </a14:m>
@@ -10751,7 +11066,19 @@
                           <a:rPr lang="pt-BR" sz="2800" b="0" i="1" smtClean="0">
                             <a:latin typeface="Cambria Math" panose="02040503050406030204" pitchFamily="18" charset="0"/>
                           </a:rPr>
-                          <m:t>0,25</m:t>
+                          <m:t>0</m:t>
+                        </m:r>
+                        <m:r>
+                          <a:rPr lang="pt-BR" sz="2800" b="0" i="1" smtClean="0">
+                            <a:latin typeface="Cambria Math" panose="02040503050406030204" pitchFamily="18" charset="0"/>
+                          </a:rPr>
+                          <m:t>,</m:t>
+                        </m:r>
+                        <m:r>
+                          <a:rPr lang="pt-BR" sz="2800" b="0" i="1" smtClean="0">
+                            <a:latin typeface="Cambria Math" panose="02040503050406030204" pitchFamily="18" charset="0"/>
+                          </a:rPr>
+                          <m:t>25</m:t>
                         </m:r>
                       </m:e>
                     </m:d>
@@ -10797,7 +11124,19 @@
                           <a:rPr lang="pt-BR" sz="2800" b="0" i="1" smtClean="0">
                             <a:latin typeface="Cambria Math" panose="02040503050406030204" pitchFamily="18" charset="0"/>
                           </a:rPr>
-                          <m:t>0,50</m:t>
+                          <m:t>0</m:t>
+                        </m:r>
+                        <m:r>
+                          <a:rPr lang="pt-BR" sz="2800" b="0" i="1" smtClean="0">
+                            <a:latin typeface="Cambria Math" panose="02040503050406030204" pitchFamily="18" charset="0"/>
+                          </a:rPr>
+                          <m:t>,</m:t>
+                        </m:r>
+                        <m:r>
+                          <a:rPr lang="pt-BR" sz="2800" b="0" i="1" smtClean="0">
+                            <a:latin typeface="Cambria Math" panose="02040503050406030204" pitchFamily="18" charset="0"/>
+                          </a:rPr>
+                          <m:t>50</m:t>
                         </m:r>
                       </m:e>
                     </m:d>
@@ -10837,7 +11176,19 @@
                           <a:rPr lang="pt-BR" sz="2800" b="0" i="1" smtClean="0">
                             <a:latin typeface="Cambria Math" panose="02040503050406030204" pitchFamily="18" charset="0"/>
                           </a:rPr>
-                          <m:t>0,75</m:t>
+                          <m:t>0</m:t>
+                        </m:r>
+                        <m:r>
+                          <a:rPr lang="pt-BR" sz="2800" b="0" i="1" smtClean="0">
+                            <a:latin typeface="Cambria Math" panose="02040503050406030204" pitchFamily="18" charset="0"/>
+                          </a:rPr>
+                          <m:t>,</m:t>
+                        </m:r>
+                        <m:r>
+                          <a:rPr lang="pt-BR" sz="2800" b="0" i="1" smtClean="0">
+                            <a:latin typeface="Cambria Math" panose="02040503050406030204" pitchFamily="18" charset="0"/>
+                          </a:rPr>
+                          <m:t>75</m:t>
                         </m:r>
                       </m:e>
                     </m:d>
@@ -10877,7 +11228,19 @@
                           <a:rPr lang="pt-BR" sz="2800" b="0" i="1" smtClean="0">
                             <a:latin typeface="Cambria Math" panose="02040503050406030204" pitchFamily="18" charset="0"/>
                           </a:rPr>
-                          <m:t>0,95</m:t>
+                          <m:t>0</m:t>
+                        </m:r>
+                        <m:r>
+                          <a:rPr lang="pt-BR" sz="2800" b="0" i="1" smtClean="0">
+                            <a:latin typeface="Cambria Math" panose="02040503050406030204" pitchFamily="18" charset="0"/>
+                          </a:rPr>
+                          <m:t>,</m:t>
+                        </m:r>
+                        <m:r>
+                          <a:rPr lang="pt-BR" sz="2800" b="0" i="1" smtClean="0">
+                            <a:latin typeface="Cambria Math" panose="02040503050406030204" pitchFamily="18" charset="0"/>
+                          </a:rPr>
+                          <m:t>95</m:t>
                         </m:r>
                       </m:e>
                     </m:d>
@@ -10906,7 +11269,19 @@
                           <a:rPr lang="pt-BR" sz="2800" b="0" i="1" smtClean="0">
                             <a:latin typeface="Cambria Math" panose="02040503050406030204" pitchFamily="18" charset="0"/>
                           </a:rPr>
-                          <m:t>0,31</m:t>
+                          <m:t>0</m:t>
+                        </m:r>
+                        <m:r>
+                          <a:rPr lang="pt-BR" sz="2800" b="0" i="1" smtClean="0">
+                            <a:latin typeface="Cambria Math" panose="02040503050406030204" pitchFamily="18" charset="0"/>
+                          </a:rPr>
+                          <m:t>,</m:t>
+                        </m:r>
+                        <m:r>
+                          <a:rPr lang="pt-BR" sz="2800" b="0" i="1" smtClean="0">
+                            <a:latin typeface="Cambria Math" panose="02040503050406030204" pitchFamily="18" charset="0"/>
+                          </a:rPr>
+                          <m:t>31</m:t>
                         </m:r>
                       </m:e>
                     </m:d>
@@ -10935,7 +11310,19 @@
                           <a:rPr lang="pt-BR" sz="2800" b="0" i="1" smtClean="0">
                             <a:latin typeface="Cambria Math" panose="02040503050406030204" pitchFamily="18" charset="0"/>
                           </a:rPr>
-                          <m:t>0,40</m:t>
+                          <m:t>0</m:t>
+                        </m:r>
+                        <m:r>
+                          <a:rPr lang="pt-BR" sz="2800" b="0" i="1" smtClean="0">
+                            <a:latin typeface="Cambria Math" panose="02040503050406030204" pitchFamily="18" charset="0"/>
+                          </a:rPr>
+                          <m:t>,</m:t>
+                        </m:r>
+                        <m:r>
+                          <a:rPr lang="pt-BR" sz="2800" b="0" i="1" smtClean="0">
+                            <a:latin typeface="Cambria Math" panose="02040503050406030204" pitchFamily="18" charset="0"/>
+                          </a:rPr>
+                          <m:t>40</m:t>
                         </m:r>
                       </m:e>
                     </m:d>
@@ -11109,19 +11496,115 @@
                       <a:rPr lang="pt-BR" sz="2800" i="1" dirty="0" smtClean="0">
                         <a:latin typeface="Cambria Math" panose="02040503050406030204" pitchFamily="18" charset="0"/>
                       </a:rPr>
-                      <m:t>{15</m:t>
+                      <m:t>{</m:t>
+                    </m:r>
+                    <m:r>
+                      <a:rPr lang="pt-BR" sz="2800" i="1" dirty="0" smtClean="0">
+                        <a:latin typeface="Cambria Math" panose="02040503050406030204" pitchFamily="18" charset="0"/>
+                      </a:rPr>
+                      <m:t>15</m:t>
                     </m:r>
                     <m:r>
                       <a:rPr lang="pt-BR" sz="2800" i="1" dirty="0">
                         <a:latin typeface="Cambria Math" panose="02040503050406030204" pitchFamily="18" charset="0"/>
                       </a:rPr>
-                      <m:t>, 5, 3, 8, 10, 2, 7, 11, </m:t>
+                      <m:t>, </m:t>
+                    </m:r>
+                    <m:r>
+                      <a:rPr lang="pt-BR" sz="2800" i="1" dirty="0">
+                        <a:latin typeface="Cambria Math" panose="02040503050406030204" pitchFamily="18" charset="0"/>
+                      </a:rPr>
+                      <m:t>5</m:t>
+                    </m:r>
+                    <m:r>
+                      <a:rPr lang="pt-BR" sz="2800" i="1" dirty="0">
+                        <a:latin typeface="Cambria Math" panose="02040503050406030204" pitchFamily="18" charset="0"/>
+                      </a:rPr>
+                      <m:t>, </m:t>
+                    </m:r>
+                    <m:r>
+                      <a:rPr lang="pt-BR" sz="2800" i="1" dirty="0">
+                        <a:latin typeface="Cambria Math" panose="02040503050406030204" pitchFamily="18" charset="0"/>
+                      </a:rPr>
+                      <m:t>3</m:t>
+                    </m:r>
+                    <m:r>
+                      <a:rPr lang="pt-BR" sz="2800" i="1" dirty="0">
+                        <a:latin typeface="Cambria Math" panose="02040503050406030204" pitchFamily="18" charset="0"/>
+                      </a:rPr>
+                      <m:t>, </m:t>
+                    </m:r>
+                    <m:r>
+                      <a:rPr lang="pt-BR" sz="2800" i="1" dirty="0">
+                        <a:latin typeface="Cambria Math" panose="02040503050406030204" pitchFamily="18" charset="0"/>
+                      </a:rPr>
+                      <m:t>8</m:t>
+                    </m:r>
+                    <m:r>
+                      <a:rPr lang="pt-BR" sz="2800" i="1" dirty="0">
+                        <a:latin typeface="Cambria Math" panose="02040503050406030204" pitchFamily="18" charset="0"/>
+                      </a:rPr>
+                      <m:t>, </m:t>
+                    </m:r>
+                    <m:r>
+                      <a:rPr lang="pt-BR" sz="2800" i="1" dirty="0">
+                        <a:latin typeface="Cambria Math" panose="02040503050406030204" pitchFamily="18" charset="0"/>
+                      </a:rPr>
+                      <m:t>10</m:t>
+                    </m:r>
+                    <m:r>
+                      <a:rPr lang="pt-BR" sz="2800" i="1" dirty="0">
+                        <a:latin typeface="Cambria Math" panose="02040503050406030204" pitchFamily="18" charset="0"/>
+                      </a:rPr>
+                      <m:t>, </m:t>
+                    </m:r>
+                    <m:r>
+                      <a:rPr lang="pt-BR" sz="2800" i="1" dirty="0">
+                        <a:latin typeface="Cambria Math" panose="02040503050406030204" pitchFamily="18" charset="0"/>
+                      </a:rPr>
+                      <m:t>2</m:t>
+                    </m:r>
+                    <m:r>
+                      <a:rPr lang="pt-BR" sz="2800" i="1" dirty="0">
+                        <a:latin typeface="Cambria Math" panose="02040503050406030204" pitchFamily="18" charset="0"/>
+                      </a:rPr>
+                      <m:t>, </m:t>
+                    </m:r>
+                    <m:r>
+                      <a:rPr lang="pt-BR" sz="2800" i="1" dirty="0">
+                        <a:latin typeface="Cambria Math" panose="02040503050406030204" pitchFamily="18" charset="0"/>
+                      </a:rPr>
+                      <m:t>7</m:t>
+                    </m:r>
+                    <m:r>
+                      <a:rPr lang="pt-BR" sz="2800" i="1" dirty="0">
+                        <a:latin typeface="Cambria Math" panose="02040503050406030204" pitchFamily="18" charset="0"/>
+                      </a:rPr>
+                      <m:t>, </m:t>
+                    </m:r>
+                    <m:r>
+                      <a:rPr lang="pt-BR" sz="2800" i="1" dirty="0">
+                        <a:latin typeface="Cambria Math" panose="02040503050406030204" pitchFamily="18" charset="0"/>
+                      </a:rPr>
+                      <m:t>11</m:t>
+                    </m:r>
+                    <m:r>
+                      <a:rPr lang="pt-BR" sz="2800" i="1" dirty="0">
+                        <a:latin typeface="Cambria Math" panose="02040503050406030204" pitchFamily="18" charset="0"/>
+                      </a:rPr>
+                      <m:t>, </m:t>
                     </m:r>
                     <m:r>
                       <a:rPr lang="pt-BR" sz="2800" i="1" dirty="0" smtClean="0">
                         <a:latin typeface="Cambria Math" panose="02040503050406030204" pitchFamily="18" charset="0"/>
                       </a:rPr>
-                      <m:t>12}.</m:t>
+                      <m:t>12</m:t>
+                    </m:r>
+                    <m:r>
+                      <a:rPr lang="pt-BR" sz="2800" i="1" dirty="0" smtClean="0">
+                        <a:latin typeface="Cambria Math" panose="02040503050406030204" pitchFamily="18" charset="0"/>
+                      </a:rPr>
+                      <m:t>}.</m:t>
                     </m:r>
                   </m:oMath>
                 </a14:m>
